--- a/dist/초3/영어/소리와문자/초3_영어_소리와문자_02_알파벳N부터Z까지_학생용.pptx
+++ b/dist/초3/영어/소리와문자/초3_영어_소리와문자_02_알파벳N부터Z까지_학생용.pptx
@@ -122,13 +122,13 @@
   <p:extLst>
     <p:ext uri="{521415D9-36F7-43E2-AB2F-B90AF26B5E84}">
       <p14:sectionLst xmlns:p14="http://schemas.microsoft.com/office/powerpoint/2010/main">
-        <p14:section name="도입" id="{8472980e-83b8-00d4-3c80-e161bfd27b32}">
+        <p14:section name="도입" id="{91b244ea-48a6-2de3-8e5f-4029a747bedc}">
           <p14:sldIdLst>
             <p14:sldId id="256"/>
             <p14:sldId id="257"/>
           </p14:sldIdLst>
         </p14:section>
-        <p14:section name="개념" id="{797e5554-e8c6-fbfd-36dd-614df5082d66}">
+        <p14:section name="개념" id="{b6e18eae-2230-8466-2be0-72a5c6aba72f}">
           <p14:sldIdLst>
             <p14:sldId id="258"/>
             <p14:sldId id="259"/>
@@ -139,25 +139,25 @@
             <p14:sldId id="264"/>
           </p14:sldIdLst>
         </p14:section>
-        <p14:section name="연습" id="{745a7112-d2dc-30ae-e6f1-5aaf9664aeae}">
+        <p14:section name="연습" id="{51267a53-4a72-3679-0630-a375796e9535}">
           <p14:sldIdLst>
             <p14:sldId id="265"/>
             <p14:sldId id="266"/>
             <p14:sldId id="267"/>
           </p14:sldIdLst>
         </p14:section>
-        <p14:section name="확인" id="{3805475d-f225-a0c3-ee81-07c2b00a8d1f}">
+        <p14:section name="확인" id="{2626ea29-3e40-a78b-1745-0697dcc3e311}">
           <p14:sldIdLst>
             <p14:sldId id="268"/>
             <p14:sldId id="269"/>
           </p14:sldIdLst>
         </p14:section>
-        <p14:section name="정리" id="{9f525a30-7192-6147-115a-9d76d44af630}">
+        <p14:section name="정리" id="{2c280983-cc76-eab4-d897-4acc59dc8944}">
           <p14:sldIdLst>
             <p14:sldId id="270"/>
           </p14:sldIdLst>
         </p14:section>
-        <p14:section name="보충" id="{f530d655-0945-2f49-06de-b622ef2ec4ab}">
+        <p14:section name="보충" id="{7c319b77-755a-f439-fc62-5c41b7b3ceee}">
           <p14:sldIdLst>
             <p14:sldId id="271"/>
           </p14:sldIdLst>
@@ -3074,7 +3074,7 @@
               <a:buNone/>
             </a:pPr>
             <a:r>
-              <a:rPr lang="ko-KR" altLang="en-US" sz="5900" b="1" dirty="0">
+              <a:rPr lang="en-US" altLang="ko-KR" sz="5900" b="1" dirty="0">
                 <a:solidFill>
                   <a:srgbClr val="1F2937"/>
                 </a:solidFill>
@@ -3121,7 +3121,7 @@
               <a:buNone/>
             </a:pPr>
             <a:r>
-              <a:rPr lang="ko-KR" altLang="en-US" sz="5900" b="1" dirty="0">
+              <a:rPr lang="en-US" altLang="ko-KR" sz="5900" b="1" dirty="0">
                 <a:solidFill>
                   <a:srgbClr val="1F2937"/>
                 </a:solidFill>
@@ -3168,7 +3168,7 @@
               <a:buNone/>
             </a:pPr>
             <a:r>
-              <a:rPr lang="ko-KR" altLang="en-US" sz="5900" b="1" dirty="0">
+              <a:rPr lang="en-US" altLang="ko-KR" sz="5900" b="1" dirty="0">
                 <a:solidFill>
                   <a:srgbClr val="1F2937"/>
                 </a:solidFill>
@@ -3215,7 +3215,7 @@
               <a:buNone/>
             </a:pPr>
             <a:r>
-              <a:rPr lang="ko-KR" altLang="en-US" sz="5900" b="1" dirty="0">
+              <a:rPr lang="en-US" altLang="ko-KR" sz="5900" b="1" dirty="0">
                 <a:solidFill>
                   <a:srgbClr val="1F2937"/>
                 </a:solidFill>
@@ -3476,7 +3476,7 @@
               <a:buNone/>
             </a:pPr>
             <a:r>
-              <a:rPr lang="ko-KR" altLang="en-US" sz="5900" b="1" dirty="0">
+              <a:rPr lang="en-US" altLang="ko-KR" sz="5900" b="1" dirty="0">
                 <a:solidFill>
                   <a:srgbClr val="1F2937"/>
                 </a:solidFill>
@@ -3523,7 +3523,7 @@
               <a:buNone/>
             </a:pPr>
             <a:r>
-              <a:rPr lang="ko-KR" altLang="en-US" sz="5900" b="1" dirty="0">
+              <a:rPr lang="en-US" altLang="ko-KR" sz="5900" b="1" dirty="0">
                 <a:solidFill>
                   <a:srgbClr val="1F2937"/>
                 </a:solidFill>
@@ -3570,7 +3570,7 @@
               <a:buNone/>
             </a:pPr>
             <a:r>
-              <a:rPr lang="ko-KR" altLang="en-US" sz="5900" b="1" dirty="0">
+              <a:rPr lang="en-US" altLang="ko-KR" sz="5900" b="1" dirty="0">
                 <a:solidFill>
                   <a:srgbClr val="1F2937"/>
                 </a:solidFill>
@@ -3617,7 +3617,7 @@
               <a:buNone/>
             </a:pPr>
             <a:r>
-              <a:rPr lang="ko-KR" altLang="en-US" sz="5900" b="1" dirty="0">
+              <a:rPr lang="en-US" altLang="ko-KR" sz="5900" b="1" dirty="0">
                 <a:solidFill>
                   <a:srgbClr val="1F2937"/>
                 </a:solidFill>
@@ -3664,7 +3664,7 @@
               <a:buNone/>
             </a:pPr>
             <a:r>
-              <a:rPr lang="ko-KR" altLang="en-US" sz="5900" b="1" dirty="0">
+              <a:rPr lang="en-US" altLang="ko-KR" sz="5900" b="1" dirty="0">
                 <a:solidFill>
                   <a:srgbClr val="1F2937"/>
                 </a:solidFill>
@@ -3711,7 +3711,7 @@
               <a:buNone/>
             </a:pPr>
             <a:r>
-              <a:rPr lang="ko-KR" altLang="en-US" sz="5900" b="1" dirty="0">
+              <a:rPr lang="en-US" altLang="ko-KR" sz="5900" b="1" dirty="0">
                 <a:solidFill>
                   <a:srgbClr val="1F2937"/>
                 </a:solidFill>
@@ -3758,7 +3758,7 @@
               <a:buNone/>
             </a:pPr>
             <a:r>
-              <a:rPr lang="ko-KR" altLang="en-US" sz="5900" b="1" dirty="0">
+              <a:rPr lang="en-US" altLang="ko-KR" sz="5900" b="1" dirty="0">
                 <a:solidFill>
                   <a:srgbClr val="1F2937"/>
                 </a:solidFill>
@@ -3805,7 +3805,7 @@
               <a:buNone/>
             </a:pPr>
             <a:r>
-              <a:rPr lang="ko-KR" altLang="en-US" sz="5900" b="1" dirty="0">
+              <a:rPr lang="en-US" altLang="ko-KR" sz="5900" b="1" dirty="0">
                 <a:solidFill>
                   <a:srgbClr val="1F2937"/>
                 </a:solidFill>
@@ -3852,7 +3852,7 @@
               <a:buNone/>
             </a:pPr>
             <a:r>
-              <a:rPr lang="ko-KR" altLang="en-US" sz="5900" b="1" dirty="0">
+              <a:rPr lang="en-US" altLang="ko-KR" sz="5900" b="1" dirty="0">
                 <a:solidFill>
                   <a:srgbClr val="1F2937"/>
                 </a:solidFill>
@@ -3899,7 +3899,7 @@
               <a:buNone/>
             </a:pPr>
             <a:r>
-              <a:rPr lang="ko-KR" altLang="en-US" sz="5900" b="1" dirty="0">
+              <a:rPr lang="en-US" altLang="ko-KR" sz="5900" b="1" dirty="0">
                 <a:solidFill>
                   <a:srgbClr val="1F2937"/>
                 </a:solidFill>
@@ -3946,7 +3946,7 @@
               <a:buNone/>
             </a:pPr>
             <a:r>
-              <a:rPr lang="ko-KR" altLang="en-US" sz="5900" b="1" dirty="0">
+              <a:rPr lang="en-US" altLang="ko-KR" sz="5900" b="1" dirty="0">
                 <a:solidFill>
                   <a:srgbClr val="1F2937"/>
                 </a:solidFill>
@@ -3993,7 +3993,7 @@
               <a:buNone/>
             </a:pPr>
             <a:r>
-              <a:rPr lang="ko-KR" altLang="en-US" sz="5900" b="1" dirty="0">
+              <a:rPr lang="en-US" altLang="ko-KR" sz="5900" b="1" dirty="0">
                 <a:solidFill>
                   <a:srgbClr val="1F2937"/>
                 </a:solidFill>
@@ -4040,7 +4040,7 @@
               <a:buNone/>
             </a:pPr>
             <a:r>
-              <a:rPr lang="ko-KR" altLang="en-US" sz="5900" b="1" dirty="0">
+              <a:rPr lang="en-US" altLang="ko-KR" sz="5900" b="1" dirty="0">
                 <a:solidFill>
                   <a:srgbClr val="1F2937"/>
                 </a:solidFill>
@@ -4386,7 +4386,7 @@
               <a:buNone/>
             </a:pPr>
             <a:r>
-              <a:rPr lang="ko-KR" altLang="en-US" sz="5900" b="1" dirty="0">
+              <a:rPr lang="en-US" altLang="ko-KR" sz="5900" b="1" dirty="0">
                 <a:solidFill>
                   <a:srgbClr val="1F2937"/>
                 </a:solidFill>
@@ -4480,7 +4480,7 @@
               <a:buNone/>
             </a:pPr>
             <a:r>
-              <a:rPr lang="ko-KR" altLang="en-US" sz="5900" b="1" dirty="0">
+              <a:rPr lang="en-US" altLang="ko-KR" sz="5900" b="1" dirty="0">
                 <a:solidFill>
                   <a:srgbClr val="1F2937"/>
                 </a:solidFill>
@@ -4796,7 +4796,7 @@
               <a:buNone/>
             </a:pPr>
             <a:r>
-              <a:rPr lang="ko-KR" altLang="en-US" sz="4000" b="1" dirty="0">
+              <a:rPr lang="en-US" altLang="ko-KR" sz="4000" b="1" dirty="0">
                 <a:solidFill>
                   <a:srgbClr val="1F2937"/>
                 </a:solidFill>
@@ -4843,7 +4843,7 @@
               <a:buNone/>
             </a:pPr>
             <a:r>
-              <a:rPr lang="ko-KR" altLang="en-US" sz="4000" b="1" dirty="0">
+              <a:rPr lang="en-US" altLang="ko-KR" sz="4000" b="1" dirty="0">
                 <a:solidFill>
                   <a:srgbClr val="1F2937"/>
                 </a:solidFill>
@@ -4937,7 +4937,7 @@
               <a:buNone/>
             </a:pPr>
             <a:r>
-              <a:rPr lang="ko-KR" altLang="en-US" sz="4000" b="1" dirty="0">
+              <a:rPr lang="en-US" altLang="ko-KR" sz="4000" b="1" dirty="0">
                 <a:solidFill>
                   <a:srgbClr val="1F2937"/>
                 </a:solidFill>
@@ -5031,7 +5031,7 @@
               <a:buNone/>
             </a:pPr>
             <a:r>
-              <a:rPr lang="ko-KR" altLang="en-US" sz="4000" b="1" dirty="0">
+              <a:rPr lang="en-US" altLang="ko-KR" sz="4000" b="1" dirty="0">
                 <a:solidFill>
                   <a:srgbClr val="1F2937"/>
                 </a:solidFill>
@@ -5078,7 +5078,7 @@
               <a:buNone/>
             </a:pPr>
             <a:r>
-              <a:rPr lang="ko-KR" altLang="en-US" sz="4000" b="1" dirty="0">
+              <a:rPr lang="en-US" altLang="ko-KR" sz="4000" b="1" dirty="0">
                 <a:solidFill>
                   <a:srgbClr val="1F2937"/>
                 </a:solidFill>
@@ -5172,7 +5172,7 @@
               <a:buNone/>
             </a:pPr>
             <a:r>
-              <a:rPr lang="ko-KR" altLang="en-US" sz="4000" b="1" dirty="0">
+              <a:rPr lang="en-US" altLang="ko-KR" sz="4000" b="1" dirty="0">
                 <a:solidFill>
                   <a:srgbClr val="1F2937"/>
                 </a:solidFill>
@@ -5266,7 +5266,7 @@
               <a:buNone/>
             </a:pPr>
             <a:r>
-              <a:rPr lang="ko-KR" altLang="en-US" sz="4000" b="1" dirty="0">
+              <a:rPr lang="en-US" altLang="ko-KR" sz="4000" b="1" dirty="0">
                 <a:solidFill>
                   <a:srgbClr val="1F2937"/>
                 </a:solidFill>
@@ -5360,7 +5360,7 @@
               <a:buNone/>
             </a:pPr>
             <a:r>
-              <a:rPr lang="ko-KR" altLang="en-US" sz="4000" b="1" dirty="0">
+              <a:rPr lang="en-US" altLang="ko-KR" sz="4000" b="1" dirty="0">
                 <a:solidFill>
                   <a:srgbClr val="1F2937"/>
                 </a:solidFill>
@@ -5407,7 +5407,7 @@
               <a:buNone/>
             </a:pPr>
             <a:r>
-              <a:rPr lang="ko-KR" altLang="en-US" sz="4000" b="1" dirty="0">
+              <a:rPr lang="en-US" altLang="ko-KR" sz="4000" b="1" dirty="0">
                 <a:solidFill>
                   <a:srgbClr val="1F2937"/>
                 </a:solidFill>
@@ -5654,7 +5654,7 @@
               <a:buNone/>
             </a:pPr>
             <a:r>
-              <a:rPr lang="ko-KR" altLang="en-US" sz="5900" b="1" dirty="0">
+              <a:rPr lang="en-US" altLang="ko-KR" sz="5900" b="1" dirty="0">
                 <a:solidFill>
                   <a:srgbClr val="1F2937"/>
                 </a:solidFill>
@@ -5701,7 +5701,7 @@
               <a:buNone/>
             </a:pPr>
             <a:r>
-              <a:rPr lang="ko-KR" altLang="en-US" sz="5900" b="1" dirty="0">
+              <a:rPr lang="en-US" altLang="ko-KR" sz="5900" b="1" dirty="0">
                 <a:solidFill>
                   <a:srgbClr val="1F2937"/>
                 </a:solidFill>
@@ -5748,7 +5748,7 @@
               <a:buNone/>
             </a:pPr>
             <a:r>
-              <a:rPr lang="ko-KR" altLang="en-US" sz="5900" b="1" dirty="0">
+              <a:rPr lang="en-US" altLang="ko-KR" sz="5900" b="1" dirty="0">
                 <a:solidFill>
                   <a:srgbClr val="1F2937"/>
                 </a:solidFill>
@@ -5842,7 +5842,7 @@
               <a:buNone/>
             </a:pPr>
             <a:r>
-              <a:rPr lang="ko-KR" altLang="en-US" sz="5900" b="1" dirty="0">
+              <a:rPr lang="en-US" altLang="ko-KR" sz="5900" b="1" dirty="0">
                 <a:solidFill>
                   <a:srgbClr val="1F2937"/>
                 </a:solidFill>
@@ -5889,7 +5889,7 @@
               <a:buNone/>
             </a:pPr>
             <a:r>
-              <a:rPr lang="ko-KR" altLang="en-US" sz="5900" b="1" dirty="0">
+              <a:rPr lang="en-US" altLang="ko-KR" sz="5900" b="1" dirty="0">
                 <a:solidFill>
                   <a:srgbClr val="1F2937"/>
                 </a:solidFill>
@@ -5936,7 +5936,7 @@
               <a:buNone/>
             </a:pPr>
             <a:r>
-              <a:rPr lang="ko-KR" altLang="en-US" sz="5900" b="1" dirty="0">
+              <a:rPr lang="en-US" altLang="ko-KR" sz="5900" b="1" dirty="0">
                 <a:solidFill>
                   <a:srgbClr val="1F2937"/>
                 </a:solidFill>
@@ -6030,7 +6030,7 @@
               <a:buNone/>
             </a:pPr>
             <a:r>
-              <a:rPr lang="ko-KR" altLang="en-US" sz="5900" b="1" dirty="0">
+              <a:rPr lang="en-US" altLang="ko-KR" sz="5900" b="1" dirty="0">
                 <a:solidFill>
                   <a:srgbClr val="1F2937"/>
                 </a:solidFill>
@@ -6124,7 +6124,7 @@
               <a:buNone/>
             </a:pPr>
             <a:r>
-              <a:rPr lang="ko-KR" altLang="en-US" sz="5900" b="1" dirty="0">
+              <a:rPr lang="en-US" altLang="ko-KR" sz="5900" b="1" dirty="0">
                 <a:solidFill>
                   <a:srgbClr val="1F2937"/>
                 </a:solidFill>
@@ -6218,7 +6218,7 @@
               <a:buNone/>
             </a:pPr>
             <a:r>
-              <a:rPr lang="ko-KR" altLang="en-US" sz="5900" b="1" dirty="0">
+              <a:rPr lang="en-US" altLang="ko-KR" sz="5900" b="1" dirty="0">
                 <a:solidFill>
                   <a:srgbClr val="1F2937"/>
                 </a:solidFill>
@@ -6265,7 +6265,7 @@
               <a:buNone/>
             </a:pPr>
             <a:r>
-              <a:rPr lang="ko-KR" altLang="en-US" sz="5900" b="1" dirty="0">
+              <a:rPr lang="en-US" altLang="ko-KR" sz="5900" b="1" dirty="0">
                 <a:solidFill>
                   <a:srgbClr val="1F2937"/>
                 </a:solidFill>
@@ -6312,7 +6312,7 @@
               <a:buNone/>
             </a:pPr>
             <a:r>
-              <a:rPr lang="ko-KR" altLang="en-US" sz="5900" b="1" dirty="0">
+              <a:rPr lang="en-US" altLang="ko-KR" sz="5900" b="1" dirty="0">
                 <a:solidFill>
                   <a:srgbClr val="1F2937"/>
                 </a:solidFill>
@@ -6589,7 +6589,7 @@
               <a:buNone/>
             </a:pPr>
             <a:r>
-              <a:rPr lang="ko-KR" altLang="en-US" sz="6300" b="1" dirty="0">
+              <a:rPr lang="en-US" altLang="ko-KR" sz="6300" b="1" dirty="0">
                 <a:solidFill>
                   <a:srgbClr val="1F2937"/>
                 </a:solidFill>
@@ -6683,7 +6683,7 @@
               <a:buNone/>
             </a:pPr>
             <a:r>
-              <a:rPr lang="ko-KR" altLang="en-US" sz="6300" b="1" dirty="0">
+              <a:rPr lang="en-US" altLang="ko-KR" sz="6300" b="1" dirty="0">
                 <a:solidFill>
                   <a:srgbClr val="1F2937"/>
                 </a:solidFill>
@@ -6777,7 +6777,7 @@
               <a:buNone/>
             </a:pPr>
             <a:r>
-              <a:rPr lang="ko-KR" altLang="en-US" sz="6300" b="1" dirty="0">
+              <a:rPr lang="en-US" altLang="ko-KR" sz="6300" b="1" dirty="0">
                 <a:solidFill>
                   <a:srgbClr val="1F2937"/>
                 </a:solidFill>
@@ -6871,7 +6871,7 @@
               <a:buNone/>
             </a:pPr>
             <a:r>
-              <a:rPr lang="ko-KR" altLang="en-US" sz="6300" b="1" dirty="0">
+              <a:rPr lang="en-US" altLang="ko-KR" sz="6300" b="1" dirty="0">
                 <a:solidFill>
                   <a:srgbClr val="1F2937"/>
                 </a:solidFill>
@@ -7662,7 +7662,7 @@
               <a:buNone/>
             </a:pPr>
             <a:r>
-              <a:rPr lang="ko-KR" altLang="en-US" sz="5100" b="1" dirty="0">
+              <a:rPr lang="en-US" altLang="ko-KR" sz="5100" b="1" dirty="0">
                 <a:solidFill>
                   <a:srgbClr val="1F2937"/>
                 </a:solidFill>
@@ -7709,7 +7709,7 @@
               <a:buNone/>
             </a:pPr>
             <a:r>
-              <a:rPr lang="ko-KR" altLang="en-US" sz="5100" b="1" dirty="0">
+              <a:rPr lang="en-US" altLang="ko-KR" sz="5100" b="1" dirty="0">
                 <a:solidFill>
                   <a:srgbClr val="1F2937"/>
                 </a:solidFill>
@@ -7756,7 +7756,7 @@
               <a:buNone/>
             </a:pPr>
             <a:r>
-              <a:rPr lang="ko-KR" altLang="en-US" sz="5100" b="1" dirty="0">
+              <a:rPr lang="en-US" altLang="ko-KR" sz="5100" b="1" dirty="0">
                 <a:solidFill>
                   <a:srgbClr val="1F2937"/>
                 </a:solidFill>
@@ -7803,7 +7803,7 @@
               <a:buNone/>
             </a:pPr>
             <a:r>
-              <a:rPr lang="ko-KR" altLang="en-US" sz="5100" b="1" dirty="0">
+              <a:rPr lang="en-US" altLang="ko-KR" sz="5100" b="1" dirty="0">
                 <a:solidFill>
                   <a:srgbClr val="1F2937"/>
                 </a:solidFill>
@@ -7850,7 +7850,7 @@
               <a:buNone/>
             </a:pPr>
             <a:r>
-              <a:rPr lang="ko-KR" altLang="en-US" sz="5100" b="1" dirty="0">
+              <a:rPr lang="en-US" altLang="ko-KR" sz="5100" b="1" dirty="0">
                 <a:solidFill>
                   <a:srgbClr val="1F2937"/>
                 </a:solidFill>
@@ -7897,7 +7897,7 @@
               <a:buNone/>
             </a:pPr>
             <a:r>
-              <a:rPr lang="ko-KR" altLang="en-US" sz="5100" b="1" dirty="0">
+              <a:rPr lang="en-US" altLang="ko-KR" sz="5100" b="1" dirty="0">
                 <a:solidFill>
                   <a:srgbClr val="1F2937"/>
                 </a:solidFill>
@@ -7944,7 +7944,7 @@
               <a:buNone/>
             </a:pPr>
             <a:r>
-              <a:rPr lang="ko-KR" altLang="en-US" sz="5100" b="1" dirty="0">
+              <a:rPr lang="en-US" altLang="ko-KR" sz="5100" b="1" dirty="0">
                 <a:solidFill>
                   <a:srgbClr val="1F2937"/>
                 </a:solidFill>
@@ -7991,7 +7991,7 @@
               <a:buNone/>
             </a:pPr>
             <a:r>
-              <a:rPr lang="ko-KR" altLang="en-US" sz="5100" b="1" dirty="0">
+              <a:rPr lang="en-US" altLang="ko-KR" sz="5100" b="1" dirty="0">
                 <a:solidFill>
                   <a:srgbClr val="1F2937"/>
                 </a:solidFill>
@@ -8038,7 +8038,7 @@
               <a:buNone/>
             </a:pPr>
             <a:r>
-              <a:rPr lang="ko-KR" altLang="en-US" sz="5100" b="1" dirty="0">
+              <a:rPr lang="en-US" altLang="ko-KR" sz="5100" b="1" dirty="0">
                 <a:solidFill>
                   <a:srgbClr val="1F2937"/>
                 </a:solidFill>
@@ -8085,7 +8085,7 @@
               <a:buNone/>
             </a:pPr>
             <a:r>
-              <a:rPr lang="ko-KR" altLang="en-US" sz="5100" b="1" dirty="0">
+              <a:rPr lang="en-US" altLang="ko-KR" sz="5100" b="1" dirty="0">
                 <a:solidFill>
                   <a:srgbClr val="1F2937"/>
                 </a:solidFill>
@@ -8132,7 +8132,7 @@
               <a:buNone/>
             </a:pPr>
             <a:r>
-              <a:rPr lang="ko-KR" altLang="en-US" sz="5100" b="1" dirty="0">
+              <a:rPr lang="en-US" altLang="ko-KR" sz="5100" b="1" dirty="0">
                 <a:solidFill>
                   <a:srgbClr val="1F2937"/>
                 </a:solidFill>
@@ -8179,7 +8179,7 @@
               <a:buNone/>
             </a:pPr>
             <a:r>
-              <a:rPr lang="ko-KR" altLang="en-US" sz="5100" b="1" dirty="0">
+              <a:rPr lang="en-US" altLang="ko-KR" sz="5100" b="1" dirty="0">
                 <a:solidFill>
                   <a:srgbClr val="1F2937"/>
                 </a:solidFill>
@@ -8226,7 +8226,7 @@
               <a:buNone/>
             </a:pPr>
             <a:r>
-              <a:rPr lang="ko-KR" altLang="en-US" sz="5100" b="1" dirty="0">
+              <a:rPr lang="en-US" altLang="ko-KR" sz="5100" b="1" dirty="0">
                 <a:solidFill>
                   <a:srgbClr val="1F2937"/>
                 </a:solidFill>
@@ -8473,7 +8473,7 @@
               <a:buNone/>
             </a:pPr>
             <a:r>
-              <a:rPr lang="ko-KR" altLang="en-US" sz="5300" b="1" dirty="0">
+              <a:rPr lang="en-US" altLang="ko-KR" sz="5300" b="1" dirty="0">
                 <a:solidFill>
                   <a:srgbClr val="1F2937"/>
                 </a:solidFill>
@@ -8520,7 +8520,7 @@
               <a:buNone/>
             </a:pPr>
             <a:r>
-              <a:rPr lang="ko-KR" altLang="en-US" sz="5300" b="1" dirty="0">
+              <a:rPr lang="en-US" altLang="ko-KR" sz="5300" b="1" dirty="0">
                 <a:solidFill>
                   <a:srgbClr val="1F2937"/>
                 </a:solidFill>
@@ -8567,7 +8567,7 @@
               <a:buNone/>
             </a:pPr>
             <a:r>
-              <a:rPr lang="ko-KR" altLang="en-US" sz="5300" b="1" dirty="0">
+              <a:rPr lang="en-US" altLang="ko-KR" sz="5300" b="1" dirty="0">
                 <a:solidFill>
                   <a:srgbClr val="1F2937"/>
                 </a:solidFill>
@@ -8614,7 +8614,7 @@
               <a:buNone/>
             </a:pPr>
             <a:r>
-              <a:rPr lang="ko-KR" altLang="en-US" sz="5300" b="1" dirty="0">
+              <a:rPr lang="en-US" altLang="ko-KR" sz="5300" b="1" dirty="0">
                 <a:solidFill>
                   <a:srgbClr val="1F2937"/>
                 </a:solidFill>
@@ -8708,7 +8708,7 @@
               <a:buNone/>
             </a:pPr>
             <a:r>
-              <a:rPr lang="ko-KR" altLang="en-US" sz="5900" b="1" dirty="0">
+              <a:rPr lang="en-US" altLang="ko-KR" sz="5900" b="1" dirty="0">
                 <a:solidFill>
                   <a:srgbClr val="1F2937"/>
                 </a:solidFill>
@@ -8755,7 +8755,7 @@
               <a:buNone/>
             </a:pPr>
             <a:r>
-              <a:rPr lang="ko-KR" altLang="en-US" sz="5900" b="1" dirty="0">
+              <a:rPr lang="en-US" altLang="ko-KR" sz="5900" b="1" dirty="0">
                 <a:solidFill>
                   <a:srgbClr val="1F2937"/>
                 </a:solidFill>
@@ -9170,7 +9170,7 @@
               <a:buNone/>
             </a:pPr>
             <a:r>
-              <a:rPr lang="ko-KR" altLang="en-US" sz="7900" b="1" dirty="0">
+              <a:rPr lang="en-US" altLang="ko-KR" sz="7900" b="1" dirty="0">
                 <a:solidFill>
                   <a:srgbClr val="1F2937"/>
                 </a:solidFill>
@@ -9217,7 +9217,7 @@
               <a:buNone/>
             </a:pPr>
             <a:r>
-              <a:rPr lang="ko-KR" altLang="en-US" sz="7900" b="1" dirty="0">
+              <a:rPr lang="en-US" altLang="ko-KR" sz="7900" b="1" dirty="0">
                 <a:solidFill>
                   <a:srgbClr val="1F2937"/>
                 </a:solidFill>
@@ -9516,7 +9516,7 @@
               <a:buNone/>
             </a:pPr>
             <a:r>
-              <a:rPr lang="ko-KR" altLang="en-US" sz="8700" b="1" dirty="0">
+              <a:rPr lang="en-US" altLang="ko-KR" sz="8700" b="1" dirty="0">
                 <a:solidFill>
                   <a:srgbClr val="1F2937"/>
                 </a:solidFill>
@@ -9563,7 +9563,7 @@
               <a:buNone/>
             </a:pPr>
             <a:r>
-              <a:rPr lang="ko-KR" altLang="en-US" sz="8700" b="1" dirty="0">
+              <a:rPr lang="en-US" altLang="ko-KR" sz="8700" b="1" dirty="0">
                 <a:solidFill>
                   <a:srgbClr val="1F2937"/>
                 </a:solidFill>
@@ -9862,7 +9862,7 @@
               <a:buNone/>
             </a:pPr>
             <a:r>
-              <a:rPr lang="ko-KR" altLang="en-US" sz="8700" b="1" dirty="0">
+              <a:rPr lang="en-US" altLang="ko-KR" sz="8700" b="1" dirty="0">
                 <a:solidFill>
                   <a:srgbClr val="1F2937"/>
                 </a:solidFill>
@@ -9909,7 +9909,7 @@
               <a:buNone/>
             </a:pPr>
             <a:r>
-              <a:rPr lang="ko-KR" altLang="en-US" sz="8700" b="1" dirty="0">
+              <a:rPr lang="en-US" altLang="ko-KR" sz="8700" b="1" dirty="0">
                 <a:solidFill>
                   <a:srgbClr val="1F2937"/>
                 </a:solidFill>
@@ -10208,7 +10208,7 @@
               <a:buNone/>
             </a:pPr>
             <a:r>
-              <a:rPr lang="ko-KR" altLang="en-US" sz="8700" b="1" dirty="0">
+              <a:rPr lang="en-US" altLang="ko-KR" sz="8700" b="1" dirty="0">
                 <a:solidFill>
                   <a:srgbClr val="1F2937"/>
                 </a:solidFill>
@@ -10255,7 +10255,7 @@
               <a:buNone/>
             </a:pPr>
             <a:r>
-              <a:rPr lang="ko-KR" altLang="en-US" sz="8700" b="1" dirty="0">
+              <a:rPr lang="en-US" altLang="ko-KR" sz="8700" b="1" dirty="0">
                 <a:solidFill>
                   <a:srgbClr val="1F2937"/>
                 </a:solidFill>
@@ -10554,7 +10554,7 @@
               <a:buNone/>
             </a:pPr>
             <a:r>
-              <a:rPr lang="ko-KR" altLang="en-US" sz="8700" b="1" dirty="0">
+              <a:rPr lang="en-US" altLang="ko-KR" sz="8700" b="1" dirty="0">
                 <a:solidFill>
                   <a:srgbClr val="1F2937"/>
                 </a:solidFill>
@@ -10601,7 +10601,7 @@
               <a:buNone/>
             </a:pPr>
             <a:r>
-              <a:rPr lang="ko-KR" altLang="en-US" sz="8700" b="1" dirty="0">
+              <a:rPr lang="en-US" altLang="ko-KR" sz="8700" b="1" dirty="0">
                 <a:solidFill>
                   <a:srgbClr val="1F2937"/>
                 </a:solidFill>
@@ -10900,7 +10900,7 @@
               <a:buNone/>
             </a:pPr>
             <a:r>
-              <a:rPr lang="ko-KR" altLang="en-US" sz="8700" b="1" dirty="0">
+              <a:rPr lang="en-US" altLang="ko-KR" sz="8700" b="1" dirty="0">
                 <a:solidFill>
                   <a:srgbClr val="1F2937"/>
                 </a:solidFill>
@@ -10947,7 +10947,7 @@
               <a:buNone/>
             </a:pPr>
             <a:r>
-              <a:rPr lang="ko-KR" altLang="en-US" sz="8700" b="1" dirty="0">
+              <a:rPr lang="en-US" altLang="ko-KR" sz="8700" b="1" dirty="0">
                 <a:solidFill>
                   <a:srgbClr val="1F2937"/>
                 </a:solidFill>
@@ -11216,7 +11216,7 @@
               <a:buNone/>
             </a:pPr>
             <a:r>
-              <a:rPr lang="ko-KR" altLang="en-US" sz="2900" b="1" dirty="0">
+              <a:rPr lang="en-US" altLang="ko-KR" sz="2900" b="1" dirty="0">
                 <a:solidFill>
                   <a:srgbClr val="1F2937"/>
                 </a:solidFill>
@@ -11263,7 +11263,7 @@
               <a:buNone/>
             </a:pPr>
             <a:r>
-              <a:rPr lang="ko-KR" altLang="en-US" sz="2900" b="1" dirty="0">
+              <a:rPr lang="en-US" altLang="ko-KR" sz="2900" b="1" dirty="0">
                 <a:solidFill>
                   <a:srgbClr val="1F2937"/>
                 </a:solidFill>
@@ -11310,7 +11310,7 @@
               <a:buNone/>
             </a:pPr>
             <a:r>
-              <a:rPr lang="ko-KR" altLang="en-US" sz="2900" b="1" dirty="0">
+              <a:rPr lang="en-US" altLang="ko-KR" sz="2900" b="1" dirty="0">
                 <a:solidFill>
                   <a:srgbClr val="1F2937"/>
                 </a:solidFill>
@@ -11357,7 +11357,7 @@
               <a:buNone/>
             </a:pPr>
             <a:r>
-              <a:rPr lang="ko-KR" altLang="en-US" sz="2900" b="1" dirty="0">
+              <a:rPr lang="en-US" altLang="ko-KR" sz="2900" b="1" dirty="0">
                 <a:solidFill>
                   <a:srgbClr val="1F2937"/>
                 </a:solidFill>
@@ -11404,7 +11404,7 @@
               <a:buNone/>
             </a:pPr>
             <a:r>
-              <a:rPr lang="ko-KR" altLang="en-US" sz="2900" b="1" dirty="0">
+              <a:rPr lang="en-US" altLang="ko-KR" sz="2900" b="1" dirty="0">
                 <a:solidFill>
                   <a:srgbClr val="1F2937"/>
                 </a:solidFill>
@@ -11451,7 +11451,7 @@
               <a:buNone/>
             </a:pPr>
             <a:r>
-              <a:rPr lang="ko-KR" altLang="en-US" sz="2900" b="1" dirty="0">
+              <a:rPr lang="en-US" altLang="ko-KR" sz="2900" b="1" dirty="0">
                 <a:solidFill>
                   <a:srgbClr val="1F2937"/>
                 </a:solidFill>
@@ -11498,7 +11498,7 @@
               <a:buNone/>
             </a:pPr>
             <a:r>
-              <a:rPr lang="ko-KR" altLang="en-US" sz="2900" b="1" dirty="0">
+              <a:rPr lang="en-US" altLang="ko-KR" sz="2900" b="1" dirty="0">
                 <a:solidFill>
                   <a:srgbClr val="1F2937"/>
                 </a:solidFill>
@@ -11545,7 +11545,7 @@
               <a:buNone/>
             </a:pPr>
             <a:r>
-              <a:rPr lang="ko-KR" altLang="en-US" sz="2900" b="1" dirty="0">
+              <a:rPr lang="en-US" altLang="ko-KR" sz="2900" b="1" dirty="0">
                 <a:solidFill>
                   <a:srgbClr val="1F2937"/>
                 </a:solidFill>
@@ -11592,7 +11592,7 @@
               <a:buNone/>
             </a:pPr>
             <a:r>
-              <a:rPr lang="ko-KR" altLang="en-US" sz="2900" b="1" dirty="0">
+              <a:rPr lang="en-US" altLang="ko-KR" sz="2900" b="1" dirty="0">
                 <a:solidFill>
                   <a:srgbClr val="1F2937"/>
                 </a:solidFill>
@@ -11639,7 +11639,7 @@
               <a:buNone/>
             </a:pPr>
             <a:r>
-              <a:rPr lang="ko-KR" altLang="en-US" sz="2900" b="1" dirty="0">
+              <a:rPr lang="en-US" altLang="ko-KR" sz="2900" b="1" dirty="0">
                 <a:solidFill>
                   <a:srgbClr val="1F2937"/>
                 </a:solidFill>
@@ -11686,7 +11686,7 @@
               <a:buNone/>
             </a:pPr>
             <a:r>
-              <a:rPr lang="ko-KR" altLang="en-US" sz="2900" b="1" dirty="0">
+              <a:rPr lang="en-US" altLang="ko-KR" sz="2900" b="1" dirty="0">
                 <a:solidFill>
                   <a:srgbClr val="1F2937"/>
                 </a:solidFill>
@@ -11733,7 +11733,7 @@
               <a:buNone/>
             </a:pPr>
             <a:r>
-              <a:rPr lang="ko-KR" altLang="en-US" sz="2900" b="1" dirty="0">
+              <a:rPr lang="en-US" altLang="ko-KR" sz="2900" b="1" dirty="0">
                 <a:solidFill>
                   <a:srgbClr val="1F2937"/>
                 </a:solidFill>
@@ -11780,7 +11780,7 @@
               <a:buNone/>
             </a:pPr>
             <a:r>
-              <a:rPr lang="ko-KR" altLang="en-US" sz="2900" b="1" dirty="0">
+              <a:rPr lang="en-US" altLang="ko-KR" sz="2900" b="1" dirty="0">
                 <a:solidFill>
                   <a:srgbClr val="1F2937"/>
                 </a:solidFill>
@@ -11827,7 +11827,7 @@
               <a:buNone/>
             </a:pPr>
             <a:r>
-              <a:rPr lang="ko-KR" altLang="en-US" sz="2900" b="1" dirty="0">
+              <a:rPr lang="en-US" altLang="ko-KR" sz="2900" b="1" dirty="0">
                 <a:solidFill>
                   <a:srgbClr val="1F2937"/>
                 </a:solidFill>
@@ -11874,7 +11874,7 @@
               <a:buNone/>
             </a:pPr>
             <a:r>
-              <a:rPr lang="ko-KR" altLang="en-US" sz="2900" b="1" dirty="0">
+              <a:rPr lang="en-US" altLang="ko-KR" sz="2900" b="1" dirty="0">
                 <a:solidFill>
                   <a:srgbClr val="1F2937"/>
                 </a:solidFill>
@@ -11921,7 +11921,7 @@
               <a:buNone/>
             </a:pPr>
             <a:r>
-              <a:rPr lang="ko-KR" altLang="en-US" sz="2900" b="1" dirty="0">
+              <a:rPr lang="en-US" altLang="ko-KR" sz="2900" b="1" dirty="0">
                 <a:solidFill>
                   <a:srgbClr val="1F2937"/>
                 </a:solidFill>
@@ -11968,7 +11968,7 @@
               <a:buNone/>
             </a:pPr>
             <a:r>
-              <a:rPr lang="ko-KR" altLang="en-US" sz="2900" b="1" dirty="0">
+              <a:rPr lang="en-US" altLang="ko-KR" sz="2900" b="1" dirty="0">
                 <a:solidFill>
                   <a:srgbClr val="1F2937"/>
                 </a:solidFill>
@@ -12015,7 +12015,7 @@
               <a:buNone/>
             </a:pPr>
             <a:r>
-              <a:rPr lang="ko-KR" altLang="en-US" sz="2900" b="1" dirty="0">
+              <a:rPr lang="en-US" altLang="ko-KR" sz="2900" b="1" dirty="0">
                 <a:solidFill>
                   <a:srgbClr val="1F2937"/>
                 </a:solidFill>
@@ -12062,7 +12062,7 @@
               <a:buNone/>
             </a:pPr>
             <a:r>
-              <a:rPr lang="ko-KR" altLang="en-US" sz="2900" b="1" dirty="0">
+              <a:rPr lang="en-US" altLang="ko-KR" sz="2900" b="1" dirty="0">
                 <a:solidFill>
                   <a:srgbClr val="1F2937"/>
                 </a:solidFill>
@@ -12109,7 +12109,7 @@
               <a:buNone/>
             </a:pPr>
             <a:r>
-              <a:rPr lang="ko-KR" altLang="en-US" sz="2900" b="1" dirty="0">
+              <a:rPr lang="en-US" altLang="ko-KR" sz="2900" b="1" dirty="0">
                 <a:solidFill>
                   <a:srgbClr val="1F2937"/>
                 </a:solidFill>
@@ -12156,7 +12156,7 @@
               <a:buNone/>
             </a:pPr>
             <a:r>
-              <a:rPr lang="ko-KR" altLang="en-US" sz="2900" b="1" dirty="0">
+              <a:rPr lang="en-US" altLang="ko-KR" sz="2900" b="1" dirty="0">
                 <a:solidFill>
                   <a:srgbClr val="1F2937"/>
                 </a:solidFill>
@@ -12203,7 +12203,7 @@
               <a:buNone/>
             </a:pPr>
             <a:r>
-              <a:rPr lang="ko-KR" altLang="en-US" sz="2900" b="1" dirty="0">
+              <a:rPr lang="en-US" altLang="ko-KR" sz="2900" b="1" dirty="0">
                 <a:solidFill>
                   <a:srgbClr val="1F2937"/>
                 </a:solidFill>
@@ -12250,7 +12250,7 @@
               <a:buNone/>
             </a:pPr>
             <a:r>
-              <a:rPr lang="ko-KR" altLang="en-US" sz="2900" b="1" dirty="0">
+              <a:rPr lang="en-US" altLang="ko-KR" sz="2900" b="1" dirty="0">
                 <a:solidFill>
                   <a:srgbClr val="1F2937"/>
                 </a:solidFill>
@@ -12297,7 +12297,7 @@
               <a:buNone/>
             </a:pPr>
             <a:r>
-              <a:rPr lang="ko-KR" altLang="en-US" sz="2900" b="1" dirty="0">
+              <a:rPr lang="en-US" altLang="ko-KR" sz="2900" b="1" dirty="0">
                 <a:solidFill>
                   <a:srgbClr val="1F2937"/>
                 </a:solidFill>
@@ -12344,7 +12344,7 @@
               <a:buNone/>
             </a:pPr>
             <a:r>
-              <a:rPr lang="ko-KR" altLang="en-US" sz="2900" b="1" dirty="0">
+              <a:rPr lang="en-US" altLang="ko-KR" sz="2900" b="1" dirty="0">
                 <a:solidFill>
                   <a:srgbClr val="1F2937"/>
                 </a:solidFill>
@@ -12391,7 +12391,7 @@
               <a:buNone/>
             </a:pPr>
             <a:r>
-              <a:rPr lang="ko-KR" altLang="en-US" sz="2900" b="1" dirty="0">
+              <a:rPr lang="en-US" altLang="ko-KR" sz="2900" b="1" dirty="0">
                 <a:solidFill>
                   <a:srgbClr val="1F2937"/>
                 </a:solidFill>

--- a/dist/초3/영어/소리와문자/초3_영어_소리와문자_02_알파벳N부터Z까지_학생용.pptx
+++ b/dist/초3/영어/소리와문자/초3_영어_소리와문자_02_알파벳N부터Z까지_학생용.pptx
@@ -122,13 +122,13 @@
   <p:extLst>
     <p:ext uri="{521415D9-36F7-43E2-AB2F-B90AF26B5E84}">
       <p14:sectionLst xmlns:p14="http://schemas.microsoft.com/office/powerpoint/2010/main">
-        <p14:section name="도입" id="{91b244ea-48a6-2de3-8e5f-4029a747bedc}">
+        <p14:section name="도입" id="{b2429c4a-801a-c22f-5e76-52cd0d99ed5f}">
           <p14:sldIdLst>
             <p14:sldId id="256"/>
             <p14:sldId id="257"/>
           </p14:sldIdLst>
         </p14:section>
-        <p14:section name="개념" id="{b6e18eae-2230-8466-2be0-72a5c6aba72f}">
+        <p14:section name="개념" id="{9c19c888-40c0-7cba-eec0-e6b89f1a577f}">
           <p14:sldIdLst>
             <p14:sldId id="258"/>
             <p14:sldId id="259"/>
@@ -139,25 +139,25 @@
             <p14:sldId id="264"/>
           </p14:sldIdLst>
         </p14:section>
-        <p14:section name="연습" id="{51267a53-4a72-3679-0630-a375796e9535}">
+        <p14:section name="연습" id="{2f128754-3297-9e65-1603-68fe60f11ec6}">
           <p14:sldIdLst>
             <p14:sldId id="265"/>
             <p14:sldId id="266"/>
             <p14:sldId id="267"/>
           </p14:sldIdLst>
         </p14:section>
-        <p14:section name="확인" id="{2626ea29-3e40-a78b-1745-0697dcc3e311}">
+        <p14:section name="확인" id="{f717ca32-7c80-076a-5c0e-39083bbe0d13}">
           <p14:sldIdLst>
             <p14:sldId id="268"/>
             <p14:sldId id="269"/>
           </p14:sldIdLst>
         </p14:section>
-        <p14:section name="정리" id="{2c280983-cc76-eab4-d897-4acc59dc8944}">
+        <p14:section name="정리" id="{27156f8e-6ab8-fb30-2a1d-b5622f30a608}">
           <p14:sldIdLst>
             <p14:sldId id="270"/>
           </p14:sldIdLst>
         </p14:section>
-        <p14:section name="보충" id="{7c319b77-755a-f439-fc62-5c41b7b3ceee}">
+        <p14:section name="보충" id="{370555b6-4d69-f593-e094-7fca1ced5fe0}">
           <p14:sldIdLst>
             <p14:sldId id="271"/>
           </p14:sldIdLst>
